--- a/Part3_TargetSim/ref/과제3_구현방법_시뮬레이션조건.pptx
+++ b/Part3_TargetSim/ref/과제3_구현방법_시뮬레이션조건.pptx
@@ -602,7 +602,7 @@
           <a:p>
             <a:r>
               <a:rPr lang="en-US" dirty="0"/>
-              <a:t>중점법은 RK2 라고도 합니다. 전역 오차가 시간간격의 제곱에 비례하므로, 간격을 절반으로 줄이면 오차가 1/4 로 떨어집니다.</a:t>
+              <a:t>자주 나오는 질문: 간격이 0.1초로 같은데 왜 다르냐. 간격은 같지만 그 간격을 대표하는 속도를 어느 시점에서 뽑느냐가 다릅니다. 잘 고른 대표값인지는 간격을 줄였을 때 오차가 얼마나 빨리 줄어드는지로 드러납니다 — 시작 방향은 1/2, 중점법은 1/4. 중점법은 RK2 라고도 부르고 전역 오차가 간격의 제곱에 비례합니다.</a:t>
             </a:r>
             <a:endParaRPr lang="en-US" dirty="0"/>
           </a:p>
@@ -2493,7 +2493,7 @@
                 <a:ea typeface="맑은 고딕" pitchFamily="34" charset="-122"/>
                 <a:cs typeface="맑은 고딕" pitchFamily="34" charset="-120"/>
               </a:rPr>
-              <a:t>가장 단순한 방법의 문제</a:t>
+              <a:t>같은 0.1초인데 무엇이 갈리나</a:t>
             </a:r>
             <a:endParaRPr lang="en-US" sz="1350" dirty="0"/>
           </a:p>
@@ -2535,7 +2535,7 @@
                 <a:ea typeface="맑은 고딕" pitchFamily="34" charset="-122"/>
                 <a:cs typeface="맑은 고딕" pitchFamily="34" charset="-120"/>
               </a:rPr>
-              <a:t>스텝 시작 시점의 방향으로 0.1초를 직진시킨다. 그런데 도는 중이라면 0.1초 사이에 방향이 이미 바뀌었다. 계속 원의 바깥으로 밀려난다.</a:t>
+              <a:t>0.1초 동안은 속도가 안 변한다고 치고 직선으로 옮긴다. 그 "안 변하는 속도"를 구간의 어느 시점에서 뽑을지가 갈린다. 시작(0초) 방향을 쓰면 도는 중에는 계속 뒤처진 방향으로 간다.</a:t>
             </a:r>
             <a:endParaRPr lang="en-US" sz="1150" dirty="0"/>
           </a:p>
@@ -2596,7 +2596,7 @@
                 <a:ea typeface="맑은 고딕" pitchFamily="34" charset="-122"/>
                 <a:cs typeface="맑은 고딕" pitchFamily="34" charset="-120"/>
               </a:rPr>
-              <a:t>그래서 한가운데 방향을 쓴다</a:t>
+              <a:t>그래서 한가운데(0.05초) 방향을 쓴다</a:t>
             </a:r>
             <a:endParaRPr lang="en-US" sz="1350" dirty="0"/>
           </a:p>
@@ -2638,7 +2638,7 @@
                 <a:ea typeface="맑은 고딕" pitchFamily="34" charset="-122"/>
                 <a:cs typeface="맑은 고딕" pitchFamily="34" charset="-120"/>
               </a:rPr>
-              <a:t>스텝 중앙(0.05초 지점)의 방향으로 0.1초를 이동시킨다. 앞 절반에서 덜 돈 오차와 뒤 절반에서 더 돈 오차가 서로 상쇄된다.</a:t>
+              <a:t>곡선 아래 넓이를 직사각형으로 어림할 때 왼쪽 끝 높이가 아니라 가운데 높이로 재는 것과 같다. 모자란 쪽과 남는 쪽이 서로 상쇄된다.</a:t>
             </a:r>
             <a:endParaRPr lang="en-US" sz="1150" dirty="0"/>
           </a:p>
@@ -2885,7 +2885,7 @@
         </p:nvSpPr>
         <p:spPr>
           <a:xfrm>
-            <a:off x="7763256" y="2944368"/>
+            <a:off x="7763256" y="2926080"/>
             <a:ext cx="3657600" cy="256032"/>
           </a:xfrm>
           <a:prstGeom prst="rect">
@@ -2910,7 +2910,7 @@
                 <a:ea typeface="맑은 고딕" pitchFamily="34" charset="-122"/>
                 <a:cs typeface="맑은 고딕" pitchFamily="34" charset="-120"/>
               </a:rPr>
-              <a:t>선회 반경 비교</a:t>
+              <a:t>간격을 줄여 보면 드러난다</a:t>
             </a:r>
             <a:endParaRPr lang="en-US" sz="1350" dirty="0"/>
           </a:p>
@@ -2924,7 +2924,7 @@
         </p:nvSpPr>
         <p:spPr>
           <a:xfrm>
-            <a:off x="7763256" y="3236976"/>
+            <a:off x="7763256" y="3218688"/>
             <a:ext cx="3621024" cy="219456"/>
           </a:xfrm>
           <a:prstGeom prst="rect">
@@ -2949,187 +2949,662 @@
                 <a:ea typeface="맑은 고딕" pitchFamily="34" charset="-122"/>
                 <a:cs typeface="맑은 고딕" pitchFamily="34" charset="-120"/>
               </a:rPr>
-              <a:t>200 m/s · 1G</a:t>
+              <a:t>200 m/s · 1G 선회 · 60초 뒤 위치 오차</a:t>
             </a:r>
             <a:endParaRPr lang="en-US" sz="1050" dirty="0"/>
           </a:p>
         </p:txBody>
       </p:sp>
-      <p:sp>
-        <p:nvSpPr>
-          <p:cNvPr id="18" name="Text 16"/>
+      <p:graphicFrame>
+        <p:nvGraphicFramePr>
+          <p:cNvPr id="11" name="Table 0"/>
+          <p:cNvGraphicFramePr>
+            <a:graphicFrameLocks noGrp="1"/>
+          </p:cNvGraphicFramePr>
+          <p:nvPr>
+            <p:extLst>
+              <p:ext uri="{D42A27DB-BD31-4B8C-83A1-F6EECF244321}">
+                <p14:modId xmlns:p14="http://schemas.microsoft.com/office/powerpoint/2010/main" val="1579011935"/>
+              </p:ext>
+            </p:extLst>
+          </p:nvPr>
+        </p:nvGraphicFramePr>
+        <p:xfrm>
+          <a:off x="7763256" y="3493008"/>
+          <a:ext cx="3621024" cy="914400"/>
+        </p:xfrm>
+        <a:graphic>
+          <a:graphicData uri="http://schemas.openxmlformats.org/drawingml/2006/table">
+            <a:tbl>
+              <a:tblPr/>
+              <a:tblGrid>
+                <a:gridCol w="914400"/>
+                <a:gridCol w="1353312"/>
+                <a:gridCol w="1353312"/>
+              </a:tblGrid>
+              <a:tr h="237744">
+                <a:tc>
+                  <a:txBody>
+                    <a:bodyPr/>
+                    <a:lstStyle/>
+                    <a:p>
+                      <a:pPr algn="l" indent="0" marL="0">
+                        <a:buNone/>
+                      </a:pPr>
+                      <a:r>
+                        <a:rPr lang="en-US" sz="1050" b="1" dirty="0">
+                          <a:solidFill>
+                            <a:srgbClr val="FFFFFF"/>
+                          </a:solidFill>
+                          <a:latin typeface="맑은 고딕" pitchFamily="34" charset="0"/>
+                          <a:ea typeface="맑은 고딕" pitchFamily="34" charset="-122"/>
+                          <a:cs typeface="맑은 고딕" pitchFamily="34" charset="-120"/>
+                        </a:rPr>
+                        <a:t>간격</a:t>
+                      </a:r>
+                      <a:endParaRPr lang="en-US" sz="1050" dirty="0">
+                        <a:latin typeface="맑은 고딕" charset="0"/>
+                        <a:ea typeface="맑은 고딕" charset="0"/>
+                        <a:cs typeface="맑은 고딕" charset="0"/>
+                      </a:endParaRPr>
+                    </a:p>
+                  </a:txBody>
+                  <a:tcPr marL="88900" marR="88900" marT="50800" marB="50800" anchor="ctr">
+                    <a:lnL w="6350" cap="flat" cmpd="sng" algn="ctr">
+                      <a:solidFill>
+                        <a:srgbClr val="CBD5E1"/>
+                      </a:solidFill>
+                      <a:prstDash val="solid"/>
+                      <a:round/>
+                      <a:headEnd type="none" w="med" len="med"/>
+                      <a:tailEnd type="none" w="med" len="med"/>
+                    </a:lnL>
+                    <a:lnR w="6350" cap="flat" cmpd="sng" algn="ctr">
+                      <a:solidFill>
+                        <a:srgbClr val="CBD5E1"/>
+                      </a:solidFill>
+                      <a:prstDash val="solid"/>
+                      <a:round/>
+                      <a:headEnd type="none" w="med" len="med"/>
+                      <a:tailEnd type="none" w="med" len="med"/>
+                    </a:lnR>
+                    <a:lnT w="6350" cap="flat" cmpd="sng" algn="ctr">
+                      <a:solidFill>
+                        <a:srgbClr val="CBD5E1"/>
+                      </a:solidFill>
+                      <a:prstDash val="solid"/>
+                      <a:round/>
+                      <a:headEnd type="none" w="med" len="med"/>
+                      <a:tailEnd type="none" w="med" len="med"/>
+                    </a:lnT>
+                    <a:lnB w="6350" cap="flat" cmpd="sng" algn="ctr">
+                      <a:solidFill>
+                        <a:srgbClr val="CBD5E1"/>
+                      </a:solidFill>
+                      <a:prstDash val="solid"/>
+                      <a:round/>
+                      <a:headEnd type="none" w="med" len="med"/>
+                      <a:tailEnd type="none" w="med" len="med"/>
+                    </a:lnB>
+                    <a:solidFill>
+                      <a:srgbClr val="15243A"/>
+                    </a:solidFill>
+                  </a:tcPr>
+                </a:tc>
+                <a:tc>
+                  <a:txBody>
+                    <a:bodyPr/>
+                    <a:lstStyle/>
+                    <a:p>
+                      <a:pPr algn="l" indent="0" marL="0">
+                        <a:buNone/>
+                      </a:pPr>
+                      <a:r>
+                        <a:rPr lang="en-US" sz="1050" b="1" dirty="0">
+                          <a:solidFill>
+                            <a:srgbClr val="FFFFFF"/>
+                          </a:solidFill>
+                          <a:latin typeface="맑은 고딕" pitchFamily="34" charset="0"/>
+                          <a:ea typeface="맑은 고딕" pitchFamily="34" charset="-122"/>
+                          <a:cs typeface="맑은 고딕" pitchFamily="34" charset="-120"/>
+                        </a:rPr>
+                        <a:t>시작 방향</a:t>
+                      </a:r>
+                      <a:endParaRPr lang="en-US" sz="1050" dirty="0">
+                        <a:latin typeface="맑은 고딕" charset="0"/>
+                        <a:ea typeface="맑은 고딕" charset="0"/>
+                        <a:cs typeface="맑은 고딕" charset="0"/>
+                      </a:endParaRPr>
+                    </a:p>
+                  </a:txBody>
+                  <a:tcPr marL="88900" marR="88900" marT="50800" marB="50800" anchor="ctr">
+                    <a:lnL w="6350" cap="flat" cmpd="sng" algn="ctr">
+                      <a:solidFill>
+                        <a:srgbClr val="CBD5E1"/>
+                      </a:solidFill>
+                      <a:prstDash val="solid"/>
+                      <a:round/>
+                      <a:headEnd type="none" w="med" len="med"/>
+                      <a:tailEnd type="none" w="med" len="med"/>
+                    </a:lnL>
+                    <a:lnR w="6350" cap="flat" cmpd="sng" algn="ctr">
+                      <a:solidFill>
+                        <a:srgbClr val="CBD5E1"/>
+                      </a:solidFill>
+                      <a:prstDash val="solid"/>
+                      <a:round/>
+                      <a:headEnd type="none" w="med" len="med"/>
+                      <a:tailEnd type="none" w="med" len="med"/>
+                    </a:lnR>
+                    <a:lnT w="6350" cap="flat" cmpd="sng" algn="ctr">
+                      <a:solidFill>
+                        <a:srgbClr val="CBD5E1"/>
+                      </a:solidFill>
+                      <a:prstDash val="solid"/>
+                      <a:round/>
+                      <a:headEnd type="none" w="med" len="med"/>
+                      <a:tailEnd type="none" w="med" len="med"/>
+                    </a:lnT>
+                    <a:lnB w="6350" cap="flat" cmpd="sng" algn="ctr">
+                      <a:solidFill>
+                        <a:srgbClr val="CBD5E1"/>
+                      </a:solidFill>
+                      <a:prstDash val="solid"/>
+                      <a:round/>
+                      <a:headEnd type="none" w="med" len="med"/>
+                      <a:tailEnd type="none" w="med" len="med"/>
+                    </a:lnB>
+                    <a:solidFill>
+                      <a:srgbClr val="15243A"/>
+                    </a:solidFill>
+                  </a:tcPr>
+                </a:tc>
+                <a:tc>
+                  <a:txBody>
+                    <a:bodyPr/>
+                    <a:lstStyle/>
+                    <a:p>
+                      <a:pPr algn="l" indent="0" marL="0">
+                        <a:buNone/>
+                      </a:pPr>
+                      <a:r>
+                        <a:rPr lang="en-US" sz="1050" b="1" dirty="0">
+                          <a:solidFill>
+                            <a:srgbClr val="FFFFFF"/>
+                          </a:solidFill>
+                          <a:latin typeface="맑은 고딕" pitchFamily="34" charset="0"/>
+                          <a:ea typeface="맑은 고딕" pitchFamily="34" charset="-122"/>
+                          <a:cs typeface="맑은 고딕" pitchFamily="34" charset="-120"/>
+                        </a:rPr>
+                        <a:t>중점법</a:t>
+                      </a:r>
+                      <a:endParaRPr lang="en-US" sz="1050" dirty="0">
+                        <a:latin typeface="맑은 고딕" charset="0"/>
+                        <a:ea typeface="맑은 고딕" charset="0"/>
+                        <a:cs typeface="맑은 고딕" charset="0"/>
+                      </a:endParaRPr>
+                    </a:p>
+                  </a:txBody>
+                  <a:tcPr marL="88900" marR="88900" marT="50800" marB="50800" anchor="ctr">
+                    <a:lnL w="6350" cap="flat" cmpd="sng" algn="ctr">
+                      <a:solidFill>
+                        <a:srgbClr val="CBD5E1"/>
+                      </a:solidFill>
+                      <a:prstDash val="solid"/>
+                      <a:round/>
+                      <a:headEnd type="none" w="med" len="med"/>
+                      <a:tailEnd type="none" w="med" len="med"/>
+                    </a:lnL>
+                    <a:lnR w="6350" cap="flat" cmpd="sng" algn="ctr">
+                      <a:solidFill>
+                        <a:srgbClr val="CBD5E1"/>
+                      </a:solidFill>
+                      <a:prstDash val="solid"/>
+                      <a:round/>
+                      <a:headEnd type="none" w="med" len="med"/>
+                      <a:tailEnd type="none" w="med" len="med"/>
+                    </a:lnR>
+                    <a:lnT w="6350" cap="flat" cmpd="sng" algn="ctr">
+                      <a:solidFill>
+                        <a:srgbClr val="CBD5E1"/>
+                      </a:solidFill>
+                      <a:prstDash val="solid"/>
+                      <a:round/>
+                      <a:headEnd type="none" w="med" len="med"/>
+                      <a:tailEnd type="none" w="med" len="med"/>
+                    </a:lnT>
+                    <a:lnB w="6350" cap="flat" cmpd="sng" algn="ctr">
+                      <a:solidFill>
+                        <a:srgbClr val="CBD5E1"/>
+                      </a:solidFill>
+                      <a:prstDash val="solid"/>
+                      <a:round/>
+                      <a:headEnd type="none" w="med" len="med"/>
+                      <a:tailEnd type="none" w="med" len="med"/>
+                    </a:lnB>
+                    <a:solidFill>
+                      <a:srgbClr val="15243A"/>
+                    </a:solidFill>
+                  </a:tcPr>
+                </a:tc>
+              </a:tr>
+              <a:tr h="237744">
+                <a:tc>
+                  <a:txBody>
+                    <a:bodyPr/>
+                    <a:lstStyle/>
+                    <a:p>
+                      <a:pPr algn="l" indent="0" marL="0">
+                        <a:buNone/>
+                      </a:pPr>
+                      <a:r>
+                        <a:rPr lang="en-US" sz="1050" dirty="0">
+                          <a:solidFill>
+                            <a:srgbClr val="15243A"/>
+                          </a:solidFill>
+                          <a:latin typeface="맑은 고딕" pitchFamily="34" charset="0"/>
+                          <a:ea typeface="맑은 고딕" pitchFamily="34" charset="-122"/>
+                          <a:cs typeface="맑은 고딕" pitchFamily="34" charset="-120"/>
+                        </a:rPr>
+                        <a:t>0.1초</a:t>
+                      </a:r>
+                      <a:endParaRPr lang="en-US" sz="1050" dirty="0">
+                        <a:latin typeface="맑은 고딕" charset="0"/>
+                        <a:ea typeface="맑은 고딕" charset="0"/>
+                        <a:cs typeface="맑은 고딕" charset="0"/>
+                      </a:endParaRPr>
+                    </a:p>
+                  </a:txBody>
+                  <a:tcPr marL="88900" marR="88900" marT="50800" marB="50800" anchor="ctr">
+                    <a:lnL w="6350" cap="flat" cmpd="sng" algn="ctr">
+                      <a:solidFill>
+                        <a:srgbClr val="CBD5E1"/>
+                      </a:solidFill>
+                      <a:prstDash val="solid"/>
+                      <a:round/>
+                      <a:headEnd type="none" w="med" len="med"/>
+                      <a:tailEnd type="none" w="med" len="med"/>
+                    </a:lnL>
+                    <a:lnR w="6350" cap="flat" cmpd="sng" algn="ctr">
+                      <a:solidFill>
+                        <a:srgbClr val="CBD5E1"/>
+                      </a:solidFill>
+                      <a:prstDash val="solid"/>
+                      <a:round/>
+                      <a:headEnd type="none" w="med" len="med"/>
+                      <a:tailEnd type="none" w="med" len="med"/>
+                    </a:lnR>
+                    <a:lnT w="6350" cap="flat" cmpd="sng" algn="ctr">
+                      <a:solidFill>
+                        <a:srgbClr val="CBD5E1"/>
+                      </a:solidFill>
+                      <a:prstDash val="solid"/>
+                      <a:round/>
+                      <a:headEnd type="none" w="med" len="med"/>
+                      <a:tailEnd type="none" w="med" len="med"/>
+                    </a:lnT>
+                    <a:lnB w="6350" cap="flat" cmpd="sng" algn="ctr">
+                      <a:solidFill>
+                        <a:srgbClr val="CBD5E1"/>
+                      </a:solidFill>
+                      <a:prstDash val="solid"/>
+                      <a:round/>
+                      <a:headEnd type="none" w="med" len="med"/>
+                      <a:tailEnd type="none" w="med" len="med"/>
+                    </a:lnB>
+                  </a:tcPr>
+                </a:tc>
+                <a:tc>
+                  <a:txBody>
+                    <a:bodyPr/>
+                    <a:lstStyle/>
+                    <a:p>
+                      <a:pPr algn="l" indent="0" marL="0">
+                        <a:buNone/>
+                      </a:pPr>
+                      <a:r>
+                        <a:rPr lang="en-US" sz="1050" dirty="0">
+                          <a:solidFill>
+                            <a:srgbClr val="15243A"/>
+                          </a:solidFill>
+                          <a:latin typeface="맑은 고딕" pitchFamily="34" charset="0"/>
+                          <a:ea typeface="맑은 고딕" pitchFamily="34" charset="-122"/>
+                          <a:cs typeface="맑은 고딕" pitchFamily="34" charset="-120"/>
+                        </a:rPr>
+                        <a:t>19.9 m</a:t>
+                      </a:r>
+                      <a:endParaRPr lang="en-US" sz="1050" dirty="0">
+                        <a:latin typeface="맑은 고딕" charset="0"/>
+                        <a:ea typeface="맑은 고딕" charset="0"/>
+                        <a:cs typeface="맑은 고딕" charset="0"/>
+                      </a:endParaRPr>
+                    </a:p>
+                  </a:txBody>
+                  <a:tcPr marL="88900" marR="88900" marT="50800" marB="50800" anchor="ctr">
+                    <a:lnL w="6350" cap="flat" cmpd="sng" algn="ctr">
+                      <a:solidFill>
+                        <a:srgbClr val="CBD5E1"/>
+                      </a:solidFill>
+                      <a:prstDash val="solid"/>
+                      <a:round/>
+                      <a:headEnd type="none" w="med" len="med"/>
+                      <a:tailEnd type="none" w="med" len="med"/>
+                    </a:lnL>
+                    <a:lnR w="6350" cap="flat" cmpd="sng" algn="ctr">
+                      <a:solidFill>
+                        <a:srgbClr val="CBD5E1"/>
+                      </a:solidFill>
+                      <a:prstDash val="solid"/>
+                      <a:round/>
+                      <a:headEnd type="none" w="med" len="med"/>
+                      <a:tailEnd type="none" w="med" len="med"/>
+                    </a:lnR>
+                    <a:lnT w="6350" cap="flat" cmpd="sng" algn="ctr">
+                      <a:solidFill>
+                        <a:srgbClr val="CBD5E1"/>
+                      </a:solidFill>
+                      <a:prstDash val="solid"/>
+                      <a:round/>
+                      <a:headEnd type="none" w="med" len="med"/>
+                      <a:tailEnd type="none" w="med" len="med"/>
+                    </a:lnT>
+                    <a:lnB w="6350" cap="flat" cmpd="sng" algn="ctr">
+                      <a:solidFill>
+                        <a:srgbClr val="CBD5E1"/>
+                      </a:solidFill>
+                      <a:prstDash val="solid"/>
+                      <a:round/>
+                      <a:headEnd type="none" w="med" len="med"/>
+                      <a:tailEnd type="none" w="med" len="med"/>
+                    </a:lnB>
+                  </a:tcPr>
+                </a:tc>
+                <a:tc>
+                  <a:txBody>
+                    <a:bodyPr/>
+                    <a:lstStyle/>
+                    <a:p>
+                      <a:pPr algn="l" indent="0" marL="0">
+                        <a:buNone/>
+                      </a:pPr>
+                      <a:r>
+                        <a:rPr lang="en-US" sz="1050" dirty="0">
+                          <a:solidFill>
+                            <a:srgbClr val="15243A"/>
+                          </a:solidFill>
+                          <a:latin typeface="맑은 고딕" pitchFamily="34" charset="0"/>
+                          <a:ea typeface="맑은 고딕" pitchFamily="34" charset="-122"/>
+                          <a:cs typeface="맑은 고딕" pitchFamily="34" charset="-120"/>
+                        </a:rPr>
+                        <a:t>0.008 m</a:t>
+                      </a:r>
+                      <a:endParaRPr lang="en-US" sz="1050" dirty="0">
+                        <a:latin typeface="맑은 고딕" charset="0"/>
+                        <a:ea typeface="맑은 고딕" charset="0"/>
+                        <a:cs typeface="맑은 고딕" charset="0"/>
+                      </a:endParaRPr>
+                    </a:p>
+                  </a:txBody>
+                  <a:tcPr marL="88900" marR="88900" marT="50800" marB="50800" anchor="ctr">
+                    <a:lnL w="6350" cap="flat" cmpd="sng" algn="ctr">
+                      <a:solidFill>
+                        <a:srgbClr val="CBD5E1"/>
+                      </a:solidFill>
+                      <a:prstDash val="solid"/>
+                      <a:round/>
+                      <a:headEnd type="none" w="med" len="med"/>
+                      <a:tailEnd type="none" w="med" len="med"/>
+                    </a:lnL>
+                    <a:lnR w="6350" cap="flat" cmpd="sng" algn="ctr">
+                      <a:solidFill>
+                        <a:srgbClr val="CBD5E1"/>
+                      </a:solidFill>
+                      <a:prstDash val="solid"/>
+                      <a:round/>
+                      <a:headEnd type="none" w="med" len="med"/>
+                      <a:tailEnd type="none" w="med" len="med"/>
+                    </a:lnR>
+                    <a:lnT w="6350" cap="flat" cmpd="sng" algn="ctr">
+                      <a:solidFill>
+                        <a:srgbClr val="CBD5E1"/>
+                      </a:solidFill>
+                      <a:prstDash val="solid"/>
+                      <a:round/>
+                      <a:headEnd type="none" w="med" len="med"/>
+                      <a:tailEnd type="none" w="med" len="med"/>
+                    </a:lnT>
+                    <a:lnB w="6350" cap="flat" cmpd="sng" algn="ctr">
+                      <a:solidFill>
+                        <a:srgbClr val="CBD5E1"/>
+                      </a:solidFill>
+                      <a:prstDash val="solid"/>
+                      <a:round/>
+                      <a:headEnd type="none" w="med" len="med"/>
+                      <a:tailEnd type="none" w="med" len="med"/>
+                    </a:lnB>
+                  </a:tcPr>
+                </a:tc>
+              </a:tr>
+              <a:tr h="237744">
+                <a:tc>
+                  <a:txBody>
+                    <a:bodyPr/>
+                    <a:lstStyle/>
+                    <a:p>
+                      <a:pPr algn="l" indent="0" marL="0">
+                        <a:buNone/>
+                      </a:pPr>
+                      <a:r>
+                        <a:rPr lang="en-US" sz="1050" dirty="0">
+                          <a:solidFill>
+                            <a:srgbClr val="15243A"/>
+                          </a:solidFill>
+                          <a:latin typeface="맑은 고딕" pitchFamily="34" charset="0"/>
+                          <a:ea typeface="맑은 고딕" pitchFamily="34" charset="-122"/>
+                          <a:cs typeface="맑은 고딕" pitchFamily="34" charset="-120"/>
+                        </a:rPr>
+                        <a:t>0.05초</a:t>
+                      </a:r>
+                      <a:endParaRPr lang="en-US" sz="1050" dirty="0">
+                        <a:latin typeface="맑은 고딕" charset="0"/>
+                        <a:ea typeface="맑은 고딕" charset="0"/>
+                        <a:cs typeface="맑은 고딕" charset="0"/>
+                      </a:endParaRPr>
+                    </a:p>
+                  </a:txBody>
+                  <a:tcPr marL="88900" marR="88900" marT="50800" marB="50800" anchor="ctr">
+                    <a:lnL w="6350" cap="flat" cmpd="sng" algn="ctr">
+                      <a:solidFill>
+                        <a:srgbClr val="CBD5E1"/>
+                      </a:solidFill>
+                      <a:prstDash val="solid"/>
+                      <a:round/>
+                      <a:headEnd type="none" w="med" len="med"/>
+                      <a:tailEnd type="none" w="med" len="med"/>
+                    </a:lnL>
+                    <a:lnR w="6350" cap="flat" cmpd="sng" algn="ctr">
+                      <a:solidFill>
+                        <a:srgbClr val="CBD5E1"/>
+                      </a:solidFill>
+                      <a:prstDash val="solid"/>
+                      <a:round/>
+                      <a:headEnd type="none" w="med" len="med"/>
+                      <a:tailEnd type="none" w="med" len="med"/>
+                    </a:lnR>
+                    <a:lnT w="6350" cap="flat" cmpd="sng" algn="ctr">
+                      <a:solidFill>
+                        <a:srgbClr val="CBD5E1"/>
+                      </a:solidFill>
+                      <a:prstDash val="solid"/>
+                      <a:round/>
+                      <a:headEnd type="none" w="med" len="med"/>
+                      <a:tailEnd type="none" w="med" len="med"/>
+                    </a:lnT>
+                    <a:lnB w="6350" cap="flat" cmpd="sng" algn="ctr">
+                      <a:solidFill>
+                        <a:srgbClr val="CBD5E1"/>
+                      </a:solidFill>
+                      <a:prstDash val="solid"/>
+                      <a:round/>
+                      <a:headEnd type="none" w="med" len="med"/>
+                      <a:tailEnd type="none" w="med" len="med"/>
+                    </a:lnB>
+                  </a:tcPr>
+                </a:tc>
+                <a:tc>
+                  <a:txBody>
+                    <a:bodyPr/>
+                    <a:lstStyle/>
+                    <a:p>
+                      <a:pPr algn="l" indent="0" marL="0">
+                        <a:buNone/>
+                      </a:pPr>
+                      <a:r>
+                        <a:rPr lang="en-US" sz="1050" dirty="0">
+                          <a:solidFill>
+                            <a:srgbClr val="15243A"/>
+                          </a:solidFill>
+                          <a:latin typeface="맑은 고딕" pitchFamily="34" charset="0"/>
+                          <a:ea typeface="맑은 고딕" pitchFamily="34" charset="-122"/>
+                          <a:cs typeface="맑은 고딕" pitchFamily="34" charset="-120"/>
+                        </a:rPr>
+                        <a:t>9.95 m  (1/2)</a:t>
+                      </a:r>
+                      <a:endParaRPr lang="en-US" sz="1050" dirty="0">
+                        <a:latin typeface="맑은 고딕" charset="0"/>
+                        <a:ea typeface="맑은 고딕" charset="0"/>
+                        <a:cs typeface="맑은 고딕" charset="0"/>
+                      </a:endParaRPr>
+                    </a:p>
+                  </a:txBody>
+                  <a:tcPr marL="88900" marR="88900" marT="50800" marB="50800" anchor="ctr">
+                    <a:lnL w="6350" cap="flat" cmpd="sng" algn="ctr">
+                      <a:solidFill>
+                        <a:srgbClr val="CBD5E1"/>
+                      </a:solidFill>
+                      <a:prstDash val="solid"/>
+                      <a:round/>
+                      <a:headEnd type="none" w="med" len="med"/>
+                      <a:tailEnd type="none" w="med" len="med"/>
+                    </a:lnL>
+                    <a:lnR w="6350" cap="flat" cmpd="sng" algn="ctr">
+                      <a:solidFill>
+                        <a:srgbClr val="CBD5E1"/>
+                      </a:solidFill>
+                      <a:prstDash val="solid"/>
+                      <a:round/>
+                      <a:headEnd type="none" w="med" len="med"/>
+                      <a:tailEnd type="none" w="med" len="med"/>
+                    </a:lnR>
+                    <a:lnT w="6350" cap="flat" cmpd="sng" algn="ctr">
+                      <a:solidFill>
+                        <a:srgbClr val="CBD5E1"/>
+                      </a:solidFill>
+                      <a:prstDash val="solid"/>
+                      <a:round/>
+                      <a:headEnd type="none" w="med" len="med"/>
+                      <a:tailEnd type="none" w="med" len="med"/>
+                    </a:lnT>
+                    <a:lnB w="6350" cap="flat" cmpd="sng" algn="ctr">
+                      <a:solidFill>
+                        <a:srgbClr val="CBD5E1"/>
+                      </a:solidFill>
+                      <a:prstDash val="solid"/>
+                      <a:round/>
+                      <a:headEnd type="none" w="med" len="med"/>
+                      <a:tailEnd type="none" w="med" len="med"/>
+                    </a:lnB>
+                  </a:tcPr>
+                </a:tc>
+                <a:tc>
+                  <a:txBody>
+                    <a:bodyPr/>
+                    <a:lstStyle/>
+                    <a:p>
+                      <a:pPr algn="l" indent="0" marL="0">
+                        <a:buNone/>
+                      </a:pPr>
+                      <a:r>
+                        <a:rPr lang="en-US" sz="1050" dirty="0">
+                          <a:solidFill>
+                            <a:srgbClr val="15243A"/>
+                          </a:solidFill>
+                          <a:latin typeface="맑은 고딕" pitchFamily="34" charset="0"/>
+                          <a:ea typeface="맑은 고딕" pitchFamily="34" charset="-122"/>
+                          <a:cs typeface="맑은 고딕" pitchFamily="34" charset="-120"/>
+                        </a:rPr>
+                        <a:t>0.002 m  (1/4)</a:t>
+                      </a:r>
+                      <a:endParaRPr lang="en-US" sz="1050" dirty="0">
+                        <a:latin typeface="맑은 고딕" charset="0"/>
+                        <a:ea typeface="맑은 고딕" charset="0"/>
+                        <a:cs typeface="맑은 고딕" charset="0"/>
+                      </a:endParaRPr>
+                    </a:p>
+                  </a:txBody>
+                  <a:tcPr marL="88900" marR="88900" marT="50800" marB="50800" anchor="ctr">
+                    <a:lnL w="6350" cap="flat" cmpd="sng" algn="ctr">
+                      <a:solidFill>
+                        <a:srgbClr val="CBD5E1"/>
+                      </a:solidFill>
+                      <a:prstDash val="solid"/>
+                      <a:round/>
+                      <a:headEnd type="none" w="med" len="med"/>
+                      <a:tailEnd type="none" w="med" len="med"/>
+                    </a:lnL>
+                    <a:lnR w="6350" cap="flat" cmpd="sng" algn="ctr">
+                      <a:solidFill>
+                        <a:srgbClr val="CBD5E1"/>
+                      </a:solidFill>
+                      <a:prstDash val="solid"/>
+                      <a:round/>
+                      <a:headEnd type="none" w="med" len="med"/>
+                      <a:tailEnd type="none" w="med" len="med"/>
+                    </a:lnR>
+                    <a:lnT w="6350" cap="flat" cmpd="sng" algn="ctr">
+                      <a:solidFill>
+                        <a:srgbClr val="CBD5E1"/>
+                      </a:solidFill>
+                      <a:prstDash val="solid"/>
+                      <a:round/>
+                      <a:headEnd type="none" w="med" len="med"/>
+                      <a:tailEnd type="none" w="med" len="med"/>
+                    </a:lnT>
+                    <a:lnB w="6350" cap="flat" cmpd="sng" algn="ctr">
+                      <a:solidFill>
+                        <a:srgbClr val="CBD5E1"/>
+                      </a:solidFill>
+                      <a:prstDash val="solid"/>
+                      <a:round/>
+                      <a:headEnd type="none" w="med" len="med"/>
+                      <a:tailEnd type="none" w="med" len="med"/>
+                    </a:lnB>
+                  </a:tcPr>
+                </a:tc>
+              </a:tr>
+            </a:tbl>
+          </a:graphicData>
+        </a:graphic>
+      </p:graphicFrame>
+      <p:sp>
+        <p:nvSpPr>
+          <p:cNvPr id="19" name="Text 16"/>
           <p:cNvSpPr txBox="1"/>
           <p:nvPr/>
         </p:nvSpPr>
         <p:spPr>
           <a:xfrm>
-            <a:off x="7763256" y="3511296"/>
-            <a:ext cx="2011680" cy="237744"/>
-          </a:xfrm>
-          <a:prstGeom prst="rect">
-            <a:avLst/>
-          </a:prstGeom>
-          <a:noFill/>
-          <a:ln/>
-        </p:spPr>
-        <p:txBody>
-          <a:bodyPr wrap="square" lIns="0" tIns="0" rIns="0" bIns="0" rtlCol="0" anchor="ctr"/>
-          <a:lstStyle/>
-          <a:p>
-            <a:pPr indent="0" marL="0">
-              <a:buNone/>
-            </a:pPr>
-            <a:r>
-              <a:rPr lang="en-US" sz="1150" dirty="0">
-                <a:solidFill>
-                  <a:srgbClr val="15243A"/>
-                </a:solidFill>
-                <a:latin typeface="맑은 고딕" pitchFamily="34" charset="0"/>
-                <a:ea typeface="맑은 고딕" pitchFamily="34" charset="-122"/>
-                <a:cs typeface="맑은 고딕" pitchFamily="34" charset="-120"/>
-              </a:rPr>
-              <a:t>시작 방향 직진</a:t>
-            </a:r>
-            <a:endParaRPr lang="en-US" sz="1150" dirty="0"/>
-          </a:p>
-        </p:txBody>
-      </p:sp>
-      <p:sp>
-        <p:nvSpPr>
-          <p:cNvPr id="19" name="Text 17"/>
-          <p:cNvSpPr txBox="1"/>
-          <p:nvPr/>
-        </p:nvSpPr>
-        <p:spPr>
-          <a:xfrm>
-            <a:off x="9509760" y="3511296"/>
-            <a:ext cx="1874520" cy="237744"/>
-          </a:xfrm>
-          <a:prstGeom prst="rect">
-            <a:avLst/>
-          </a:prstGeom>
-          <a:noFill/>
-          <a:ln/>
-        </p:spPr>
-        <p:txBody>
-          <a:bodyPr wrap="square" lIns="0" tIns="0" rIns="0" bIns="0" rtlCol="0" anchor="ctr"/>
-          <a:lstStyle/>
-          <a:p>
-            <a:pPr algn="r" indent="0" marL="0">
-              <a:buNone/>
-            </a:pPr>
-            <a:r>
-              <a:rPr lang="en-US" sz="1150" b="1" dirty="0">
-                <a:solidFill>
-                  <a:srgbClr val="9E3B32"/>
-                </a:solidFill>
-                <a:latin typeface="맑은 고딕" pitchFamily="34" charset="0"/>
-                <a:ea typeface="맑은 고딕" pitchFamily="34" charset="-122"/>
-                <a:cs typeface="맑은 고딕" pitchFamily="34" charset="-120"/>
-              </a:rPr>
-              <a:t>+0.72 %  (약 30 m)</a:t>
-            </a:r>
-            <a:endParaRPr lang="en-US" sz="1150" dirty="0"/>
-          </a:p>
-        </p:txBody>
-      </p:sp>
-      <p:sp>
-        <p:nvSpPr>
-          <p:cNvPr id="20" name="Text 18"/>
-          <p:cNvSpPr txBox="1"/>
-          <p:nvPr/>
-        </p:nvSpPr>
-        <p:spPr>
-          <a:xfrm>
-            <a:off x="7763256" y="3822192"/>
-            <a:ext cx="2011680" cy="237744"/>
-          </a:xfrm>
-          <a:prstGeom prst="rect">
-            <a:avLst/>
-          </a:prstGeom>
-          <a:noFill/>
-          <a:ln/>
-        </p:spPr>
-        <p:txBody>
-          <a:bodyPr wrap="square" lIns="0" tIns="0" rIns="0" bIns="0" rtlCol="0" anchor="ctr"/>
-          <a:lstStyle/>
-          <a:p>
-            <a:pPr indent="0" marL="0">
-              <a:buNone/>
-            </a:pPr>
-            <a:r>
-              <a:rPr lang="en-US" sz="1150" dirty="0">
-                <a:solidFill>
-                  <a:srgbClr val="15243A"/>
-                </a:solidFill>
-                <a:latin typeface="맑은 고딕" pitchFamily="34" charset="0"/>
-                <a:ea typeface="맑은 고딕" pitchFamily="34" charset="-122"/>
-                <a:cs typeface="맑은 고딕" pitchFamily="34" charset="-120"/>
-              </a:rPr>
-              <a:t>중점법</a:t>
-            </a:r>
-            <a:endParaRPr lang="en-US" sz="1150" dirty="0"/>
-          </a:p>
-        </p:txBody>
-      </p:sp>
-      <p:sp>
-        <p:nvSpPr>
-          <p:cNvPr id="21" name="Text 19"/>
-          <p:cNvSpPr txBox="1"/>
-          <p:nvPr/>
-        </p:nvSpPr>
-        <p:spPr>
-          <a:xfrm>
-            <a:off x="9509760" y="3822192"/>
-            <a:ext cx="1874520" cy="237744"/>
-          </a:xfrm>
-          <a:prstGeom prst="rect">
-            <a:avLst/>
-          </a:prstGeom>
-          <a:noFill/>
-          <a:ln/>
-        </p:spPr>
-        <p:txBody>
-          <a:bodyPr wrap="square" lIns="0" tIns="0" rIns="0" bIns="0" rtlCol="0" anchor="ctr"/>
-          <a:lstStyle/>
-          <a:p>
-            <a:pPr algn="r" indent="0" marL="0">
-              <a:buNone/>
-            </a:pPr>
-            <a:r>
-              <a:rPr lang="en-US" sz="1150" b="1" dirty="0">
-                <a:solidFill>
-                  <a:srgbClr val="1C7293"/>
-                </a:solidFill>
-                <a:latin typeface="맑은 고딕" pitchFamily="34" charset="0"/>
-                <a:ea typeface="맑은 고딕" pitchFamily="34" charset="-122"/>
-                <a:cs typeface="맑은 고딕" pitchFamily="34" charset="-120"/>
-              </a:rPr>
-              <a:t>상쇄</a:t>
-            </a:r>
-            <a:endParaRPr lang="en-US" sz="1150" dirty="0"/>
-          </a:p>
-        </p:txBody>
-      </p:sp>
-      <p:sp>
-        <p:nvSpPr>
-          <p:cNvPr id="22" name="Text 20"/>
-          <p:cNvSpPr txBox="1"/>
-          <p:nvPr/>
-        </p:nvSpPr>
-        <p:spPr>
-          <a:xfrm>
-            <a:off x="7763256" y="4206240"/>
-            <a:ext cx="3621024" cy="658368"/>
-          </a:xfrm>
-          <a:prstGeom prst="rect">
-            <a:avLst/>
-          </a:prstGeom>
-          <a:noFill/>
-          <a:ln/>
-        </p:spPr>
-        <p:txBody>
-          <a:bodyPr wrap="square" lIns="0" tIns="0" rIns="0" bIns="0" rtlCol="0" anchor="ctr"/>
+            <a:off x="7763256" y="4407408"/>
+            <a:ext cx="3621024" cy="530352"/>
+          </a:xfrm>
+          <a:prstGeom prst="rect">
+            <a:avLst/>
+          </a:prstGeom>
+          <a:noFill/>
+          <a:ln/>
+        </p:spPr>
+        <p:txBody>
+          <a:bodyPr wrap="square" lIns="0" tIns="0" rIns="0" bIns="0" rtlCol="0" anchor="t"/>
           <a:lstStyle/>
           <a:p>
             <a:pPr indent="0" marL="0">
@@ -3139,7 +3614,7 @@
               <a:buNone/>
             </a:pPr>
             <a:r>
-              <a:rPr lang="en-US" sz="1050" dirty="0">
+              <a:rPr lang="en-US" sz="1000" dirty="0">
                 <a:solidFill>
                   <a:srgbClr val="5C6B80"/>
                 </a:solidFill>
@@ -3147,15 +3622,15 @@
                 <a:ea typeface="맑은 고딕" pitchFamily="34" charset="-122"/>
                 <a:cs typeface="맑은 고딕" pitchFamily="34" charset="-120"/>
               </a:rPr>
-              <a:t>추가 비용은 속도를 한 번 더 만드는 것뿐이라, 더 복잡한 방법(RK4)까지 갈 필요가 없다.</a:t>
-            </a:r>
-            <a:endParaRPr lang="en-US" sz="1050" dirty="0"/>
-          </a:p>
-        </p:txBody>
-      </p:sp>
-      <p:sp>
-        <p:nvSpPr>
-          <p:cNvPr id="23" name="Shape 21"/>
+              <a:t>반경은 두 방법 모두 정확하다. 차이는 궤적이 반 스텝(10 m)만큼 옆으로 밀리는 것으로 나타난다.</a:t>
+            </a:r>
+            <a:endParaRPr lang="en-US" sz="1000" dirty="0"/>
+          </a:p>
+        </p:txBody>
+      </p:sp>
+      <p:sp>
+        <p:nvSpPr>
+          <p:cNvPr id="20" name="Shape 17"/>
           <p:cNvSpPr/>
           <p:nvPr/>
         </p:nvSpPr>
@@ -3177,7 +3652,7 @@
       </p:sp>
       <p:sp>
         <p:nvSpPr>
-          <p:cNvPr id="24" name="Text 22"/>
+          <p:cNvPr id="21" name="Text 18"/>
           <p:cNvSpPr txBox="1"/>
           <p:nvPr/>
         </p:nvSpPr>
@@ -3205,13 +3680,13 @@
             <a:r>
               <a:rPr lang="en-US" sz="1100" b="1" dirty="0">
                 <a:solidFill>
-                  <a:srgbClr val="9E3B32"/>
-                </a:solidFill>
-                <a:latin typeface="맑은 고딕" pitchFamily="34" charset="0"/>
-                <a:ea typeface="맑은 고딕" pitchFamily="34" charset="-122"/>
-                <a:cs typeface="맑은 고딕" pitchFamily="34" charset="-120"/>
-              </a:rPr>
-              <a:t>알려진 한계 — </a:t>
+                  <a:srgbClr val="1C7293"/>
+                </a:solidFill>
+                <a:latin typeface="맑은 고딕" pitchFamily="34" charset="0"/>
+                <a:ea typeface="맑은 고딕" pitchFamily="34" charset="-122"/>
+                <a:cs typeface="맑은 고딕" pitchFamily="34" charset="-120"/>
+              </a:rPr>
+              <a:t>추가 비용은 좌표변환 한 번뿐. </a:t>
             </a:r>
             <a:pPr indent="0" marL="0">
               <a:lnSpc>
@@ -3228,11 +3703,9 @@
                 <a:ea typeface="맑은 고딕" pitchFamily="34" charset="-122"/>
                 <a:cs typeface="맑은 고딕" pitchFamily="34" charset="-120"/>
               </a:rPr>
-              <a:t>자세를 roll·pitch·yaw 로 직접 다루므로, pitch 가 ±90°(수직 상승·하강) 근처가 되면 yaw 축이 진행 방향과 겹쳐 yaw 기동이 궤적을 바꾸지 못한다(짐벌락).</a:t>
-            </a:r>
-            <a:endParaRPr lang="en-US" sz="1100" dirty="0"/>
-          </a:p>
-          <a:p>
+              <a:t>같은 정확도를 시작 방향 방식으로 내려면 간격을 2,500배 잘게 쪼개야 하므로, 오히려 중점법이 훨씬 빠르다. RK4 까지 갈 이유가 없었다.
+</a:t>
+            </a:r>
             <a:pPr indent="0" marL="0">
               <a:lnSpc>
                 <a:spcPct val="125000"/>
@@ -3240,6 +3713,23 @@
               <a:buNone/>
             </a:pPr>
             <a:r>
+              <a:rPr lang="en-US" sz="1100" b="1" dirty="0">
+                <a:solidFill>
+                  <a:srgbClr val="9E3B32"/>
+                </a:solidFill>
+                <a:latin typeface="맑은 고딕" pitchFamily="34" charset="0"/>
+                <a:ea typeface="맑은 고딕" pitchFamily="34" charset="-122"/>
+                <a:cs typeface="맑은 고딕" pitchFamily="34" charset="-120"/>
+              </a:rPr>
+              <a:t>알려진 한계 — </a:t>
+            </a:r>
+            <a:pPr indent="0" marL="0">
+              <a:lnSpc>
+                <a:spcPct val="125000"/>
+              </a:lnSpc>
+              <a:buNone/>
+            </a:pPr>
+            <a:r>
               <a:rPr lang="en-US" sz="1100" dirty="0">
                 <a:solidFill>
                   <a:srgbClr val="15243A"/>
@@ -3248,7 +3738,7 @@
                 <a:ea typeface="맑은 고딕" pitchFamily="34" charset="-122"/>
                 <a:cs typeface="맑은 고딕" pitchFamily="34" charset="-120"/>
               </a:rPr>
-              <a:t>쿼터니언으로 가면 없어지지만, 명세가 자세를 roll·pitch·yaw 로 규정했으므로 표현을 유지하고 한계를 기록해 두는 쪽을 택했다.</a:t>
+              <a:t>자세를 roll·pitch·yaw 로 직접 다루므로 pitch 가 ±90° 근처면 yaw 축이 진행 방향과 겹쳐(짐벌락) yaw 기동이 궤적을 바꾸지 못한다. 명세가 규정한 표현이라 유지하고 한계를 기록해 두는 쪽을 택했다.</a:t>
             </a:r>
             <a:endParaRPr lang="en-US" sz="1100" dirty="0"/>
           </a:p>

--- a/Part3_TargetSim/ref/과제3_구현방법_시뮬레이션조건.pptx
+++ b/Part3_TargetSim/ref/과제3_구현방법_시뮬레이션조건.pptx
@@ -601,10 +601,8 @@
           <a:lstStyle/>
           <a:p>
             <a:r>
-              <a:rPr lang="en-US" dirty="0"/>
               <a:t>자주 나오는 질문: 간격이 0.1초로 같은데 왜 다르냐. 간격은 같지만 그 간격을 대표하는 속도를 어느 시점에서 뽑느냐가 다릅니다. 잘 고른 대표값인지는 간격을 줄였을 때 오차가 얼마나 빨리 줄어드는지로 드러납니다 — 시작 방향은 1/2, 중점법은 1/4. 중점법은 RK2 라고도 부르고 전역 오차가 간격의 제곱에 비례합니다.</a:t>
             </a:r>
-            <a:endParaRPr lang="en-US" dirty="0"/>
           </a:p>
         </p:txBody>
       </p:sp>
@@ -2638,7 +2636,7 @@
                 <a:ea typeface="맑은 고딕" pitchFamily="34" charset="-122"/>
                 <a:cs typeface="맑은 고딕" pitchFamily="34" charset="-120"/>
               </a:rPr>
-              <a:t>곡선 아래 넓이를 직사각형으로 어림할 때 왼쪽 끝 높이가 아니라 가운데 높이로 재는 것과 같다. 모자란 쪽과 남는 쪽이 서로 상쇄된다.</a:t>
+              <a:t>곡선 아래 넓이를 직사각형으로 어림할 때 왼쪽 끝 높이가 아니라 가운데 높이로 재는 것과 같다. 모자란 쪽과 남는 쪽이 서로 상쇄된다. 방향은 자세와 위치 둘 다로 정해지므로 둘 다 한가운데 값을 쓴다.</a:t>
             </a:r>
             <a:endParaRPr lang="en-US" sz="1150" dirty="0"/>
           </a:p>
@@ -2653,7 +2651,7 @@
         <p:spPr>
           <a:xfrm>
             <a:off x="566928" y="2761488"/>
-            <a:ext cx="6629400" cy="1993392"/>
+            <a:ext cx="6629400" cy="2212848"/>
           </a:xfrm>
           <a:prstGeom prst="roundRect">
             <a:avLst>
@@ -2675,7 +2673,7 @@
         <p:spPr>
           <a:xfrm>
             <a:off x="713232" y="2871216"/>
-            <a:ext cx="6336792" cy="1773936"/>
+            <a:ext cx="6336792" cy="1993392"/>
           </a:xfrm>
           <a:prstGeom prst="rect">
             <a:avLst/>
@@ -2713,6 +2711,17 @@
               </a:lnSpc>
               <a:buNone/>
             </a:pPr>
+            <a:r>
+              <a:rPr lang="en-US" sz="950" dirty="0">
+                <a:solidFill>
+                  <a:srgbClr val="E9B96E"/>
+                </a:solidFill>
+                <a:latin typeface="Consolas" pitchFamily="34" charset="0"/>
+                <a:ea typeface="Consolas" pitchFamily="34" charset="-122"/>
+                <a:cs typeface="Consolas" pitchFamily="34" charset="-120"/>
+              </a:rPr>
+              <a:t>st_AttMid.yaw = st_State-&gt;st_Att.yaw + (st_Rate-&gt;yaw * halfStep);       // 중앙 자세</a:t>
+            </a:r>
             <a:endParaRPr lang="en-US" sz="950" dirty="0"/>
           </a:p>
           <a:p>
@@ -2722,16 +2731,25 @@
               </a:lnSpc>
               <a:buNone/>
             </a:pPr>
+            <a:endParaRPr lang="en-US" sz="950" dirty="0"/>
+          </a:p>
+          <a:p>
+            <a:pPr indent="0" marL="0">
+              <a:lnSpc>
+                <a:spcPct val="118000"/>
+              </a:lnSpc>
+              <a:buNone/>
+            </a:pPr>
             <a:r>
               <a:rPr lang="en-US" sz="950" dirty="0">
                 <a:solidFill>
-                  <a:srgbClr val="E9B96E"/>
+                  <a:srgbClr val="9CD3B8"/>
                 </a:solidFill>
                 <a:latin typeface="Consolas" pitchFamily="34" charset="0"/>
                 <a:ea typeface="Consolas" pitchFamily="34" charset="-122"/>
                 <a:cs typeface="Consolas" pitchFamily="34" charset="-120"/>
               </a:rPr>
-              <a:t>st_AttMid.yaw = st_State-&gt;st_Att.yaw + (st_Rate-&gt;yaw * halfStep);   // 중앙 자세</a:t>
+              <a:t>f_Tgt_GetVelEcef(&amp;st_VelStart, &amp;st_State-&gt;st_Att, &amp;st_State-&gt;st_Lla, headingSpeed);</a:t>
             </a:r>
             <a:endParaRPr lang="en-US" sz="950" dirty="0"/>
           </a:p>
@@ -2742,6 +2760,17 @@
               </a:lnSpc>
               <a:buNone/>
             </a:pPr>
+            <a:r>
+              <a:rPr lang="en-US" sz="950" dirty="0">
+                <a:solidFill>
+                  <a:srgbClr val="D7E3F2"/>
+                </a:solidFill>
+                <a:latin typeface="Consolas" pitchFamily="34" charset="0"/>
+                <a:ea typeface="Consolas" pitchFamily="34" charset="-122"/>
+                <a:cs typeface="Consolas" pitchFamily="34" charset="-120"/>
+              </a:rPr>
+              <a:t>f_Coord_VecScale(&amp;st_Delta, &amp;st_VelStart, halfStep);                    // 반 스텝만 가 본다</a:t>
+            </a:r>
             <a:endParaRPr lang="en-US" sz="950" dirty="0"/>
           </a:p>
           <a:p>
@@ -2754,13 +2783,13 @@
             <a:r>
               <a:rPr lang="en-US" sz="950" dirty="0">
                 <a:solidFill>
-                  <a:srgbClr val="9CD3B8"/>
+                  <a:srgbClr val="D7E3F2"/>
                 </a:solidFill>
                 <a:latin typeface="Consolas" pitchFamily="34" charset="0"/>
                 <a:ea typeface="Consolas" pitchFamily="34" charset="-122"/>
                 <a:cs typeface="Consolas" pitchFamily="34" charset="-120"/>
               </a:rPr>
-              <a:t>f_Tgt_GetVelEcef(&amp;st_VelMid, &amp;st_AttMid, &amp;st_State-&gt;st_Lla, headingSpeed);</a:t>
+              <a:t>f_Coord_VecAdd(&amp;st_PosMid, &amp;st_State-&gt;st_PosEcef, &amp;st_Delta);</a:t>
             </a:r>
             <a:endParaRPr lang="en-US" sz="950" dirty="0"/>
           </a:p>
@@ -2774,13 +2803,13 @@
             <a:r>
               <a:rPr lang="en-US" sz="950" dirty="0">
                 <a:solidFill>
-                  <a:srgbClr val="D7E3F2"/>
+                  <a:srgbClr val="E9B96E"/>
                 </a:solidFill>
                 <a:latin typeface="Consolas" pitchFamily="34" charset="0"/>
                 <a:ea typeface="Consolas" pitchFamily="34" charset="-122"/>
                 <a:cs typeface="Consolas" pitchFamily="34" charset="-120"/>
               </a:rPr>
-              <a:t>f_Coord_VecScale(&amp;st_Delta,  &amp;st_VelMid, stepTime);</a:t>
+              <a:t>f_Trans_Ecef_To_Lla(&amp;st_LlaMid, &amp;st_PosMid);                            // 중앙 위치</a:t>
             </a:r>
             <a:endParaRPr lang="en-US" sz="950" dirty="0"/>
           </a:p>
@@ -2791,16 +2820,25 @@
               </a:lnSpc>
               <a:buNone/>
             </a:pPr>
+            <a:endParaRPr lang="en-US" sz="950" dirty="0"/>
+          </a:p>
+          <a:p>
+            <a:pPr indent="0" marL="0">
+              <a:lnSpc>
+                <a:spcPct val="118000"/>
+              </a:lnSpc>
+              <a:buNone/>
+            </a:pPr>
             <a:r>
               <a:rPr lang="en-US" sz="950" dirty="0">
                 <a:solidFill>
-                  <a:srgbClr val="D7E3F2"/>
+                  <a:srgbClr val="9CD3B8"/>
                 </a:solidFill>
                 <a:latin typeface="Consolas" pitchFamily="34" charset="0"/>
                 <a:ea typeface="Consolas" pitchFamily="34" charset="-122"/>
                 <a:cs typeface="Consolas" pitchFamily="34" charset="-120"/>
               </a:rPr>
-              <a:t>f_Coord_VecAdd  (&amp;st_Next.st_PosEcef, &amp;st_State-&gt;st_PosEcef, &amp;st_Delta);</a:t>
+              <a:t>f_Tgt_GetVelEcef(&amp;st_VelMid, &amp;st_AttMid, &amp;st_LlaMid, headingSpeed);     // 중앙 속도</a:t>
             </a:r>
             <a:endParaRPr lang="en-US" sz="950" dirty="0"/>
           </a:p>
@@ -2814,13 +2852,13 @@
             <a:r>
               <a:rPr lang="en-US" sz="950" dirty="0">
                 <a:solidFill>
-                  <a:srgbClr val="9CD3B8"/>
+                  <a:srgbClr val="D7E3F2"/>
                 </a:solidFill>
                 <a:latin typeface="Consolas" pitchFamily="34" charset="0"/>
                 <a:ea typeface="Consolas" pitchFamily="34" charset="-122"/>
                 <a:cs typeface="Consolas" pitchFamily="34" charset="-120"/>
               </a:rPr>
-              <a:t>f_Trans_Ecef_To_Lla(&amp;st_Next.st_Lla,  &amp;st_Next.st_PosEcef);</a:t>
+              <a:t>f_Coord_VecScale(&amp;st_Delta, &amp;st_VelMid, stepTime);</a:t>
             </a:r>
             <a:endParaRPr lang="en-US" sz="950" dirty="0"/>
           </a:p>
@@ -2831,15 +2869,6 @@
               </a:lnSpc>
               <a:buNone/>
             </a:pPr>
-            <a:endParaRPr lang="en-US" sz="950" dirty="0"/>
-          </a:p>
-          <a:p>
-            <a:pPr indent="0" marL="0">
-              <a:lnSpc>
-                <a:spcPct val="118000"/>
-              </a:lnSpc>
-              <a:buNone/>
-            </a:pPr>
             <a:r>
               <a:rPr lang="en-US" sz="950" dirty="0">
                 <a:solidFill>
@@ -2849,7 +2878,7 @@
                 <a:ea typeface="Consolas" pitchFamily="34" charset="-122"/>
                 <a:cs typeface="Consolas" pitchFamily="34" charset="-120"/>
               </a:rPr>
-              <a:t>st_Next.st_Att.yaw = f_Coord_WrapAngle(st_Att.yaw + rate.yaw * stepTime);</a:t>
+              <a:t>f_Coord_VecAdd(&amp;st_Next.st_PosEcef, &amp;st_State-&gt;st_PosEcef, &amp;st_Delta);  // 한 스텝 이동</a:t>
             </a:r>
             <a:endParaRPr lang="en-US" sz="950" dirty="0"/>
           </a:p>
@@ -3686,7 +3715,7 @@
                 <a:ea typeface="맑은 고딕" pitchFamily="34" charset="-122"/>
                 <a:cs typeface="맑은 고딕" pitchFamily="34" charset="-120"/>
               </a:rPr>
-              <a:t>추가 비용은 좌표변환 한 번뿐. </a:t>
+              <a:t>추가 비용은 스텝당 속도 계산 두 번·위경도 변환 한 번. </a:t>
             </a:r>
             <a:pPr indent="0" marL="0">
               <a:lnSpc>
@@ -8221,7 +8250,7 @@
                           <a:ea typeface="맑은 고딕" pitchFamily="34" charset="-122"/>
                           <a:cs typeface="맑은 고딕" pitchFamily="34" charset="-120"/>
                         </a:rPr>
-                        <a:t>200 × 60, 자오선 곡률반경으로 적분</a:t>
+                        <a:t>200 × 60, 자오선 곡률반경 + 고도 (M + h) 로 적분</a:t>
                       </a:r>
                       <a:endParaRPr lang="en-US" sz="1050" dirty="0">
                         <a:latin typeface="맑은 고딕" charset="0"/>
@@ -8546,7 +8575,7 @@
                 <a:ea typeface="맑은 고딕" pitchFamily="34" charset="-122"/>
                 <a:cs typeface="맑은 고딕" pitchFamily="34" charset="-120"/>
               </a:rPr>
-              <a:t>곡률반경을 어떻게 잡느냐에 따라 위경도 마지막 자리가 0.8 m 정도 달라지므로, 시작–끝 측지선 길이가 V × t 와 맞는지로 본다.</a:t>
+              <a:t>스텝마다 움직인 ECEF 거리의 합이 V × t 와 맞는지로 본다. 위경도로 잰 지표 거리는 대공 표적이 300 m 위를 날아서 11,999.43 m 가 되므로 (1 + h/M) 을 곱해 비교한다.</a:t>
             </a:r>
             <a:endParaRPr lang="en-US" sz="1100" dirty="0"/>
           </a:p>
@@ -9217,7 +9246,7 @@
                 <a:ea typeface="맑은 고딕" pitchFamily="34" charset="-122"/>
                 <a:cs typeface="맑은 고딕" pitchFamily="34" charset="-120"/>
               </a:rPr>
-              <a:t>선회할 때 바깥으로 밀리는 오차를 상쇄. 비용은 속도 계산 한 번</a:t>
+              <a:t>자세와 위치 모두 한가운데 값으로 — 선회할 때 옆으로 밀리는 오차를 상쇄한다</a:t>
             </a:r>
             <a:endParaRPr lang="en-US" sz="1200" dirty="0"/>
           </a:p>
@@ -12419,7 +12448,7 @@
                 <a:ea typeface="Consolas" pitchFamily="34" charset="-122"/>
                 <a:cs typeface="Consolas" pitchFamily="34" charset="-120"/>
               </a:rPr>
-              <a:t>    ST_CoordLla   st_Lla;       // 출력용</a:t>
+              <a:t>    ST_CoordLla   st_Lla;       // 출력 + NED 기준</a:t>
             </a:r>
             <a:endParaRPr lang="en-US" sz="1100" dirty="0"/>
           </a:p>
@@ -13101,7 +13130,7 @@
                 <a:ea typeface="맑은 고딕" pitchFamily="34" charset="-122"/>
                 <a:cs typeface="맑은 고딕" pitchFamily="34" charset="-120"/>
               </a:rPr>
-              <a:t>(Vx, Vy, Vz) 를 들고 매 스텝 조금씩 돌린다. 소수점 계산 오차가 600번 쌓이면서 속력 자체가 변한다.</a:t>
+              <a:t>(Vx, Vy, Vz) 를 들고 매 스텝 조금씩 돌린다. 한 스텝의 회전을 V += (ω × V)·Δt 로 어림하면 그때마다 크기가 늘어 600번 쌓인다.</a:t>
             </a:r>
             <a:endParaRPr lang="en-US" sz="1150" dirty="0"/>
           </a:p>
@@ -13140,7 +13169,7 @@
                 <a:ea typeface="Consolas" pitchFamily="34" charset="-122"/>
                 <a:cs typeface="Consolas" pitchFamily="34" charset="-120"/>
               </a:rPr>
-              <a:t>200.00  →  199.98 m/s</a:t>
+              <a:t>200.00  →  201.45 m/s</a:t>
             </a:r>
             <a:endParaRPr lang="en-US" sz="1900" dirty="0"/>
           </a:p>
@@ -13179,7 +13208,7 @@
                 <a:ea typeface="맑은 고딕" pitchFamily="34" charset="-122"/>
                 <a:cs typeface="맑은 고딕" pitchFamily="34" charset="-120"/>
               </a:rPr>
-              <a:t>선회한다고 느려질 이유가 없는데도 느려진다</a:t>
+              <a:t>1G 로 60초 선회했을 뿐인데 속력이 0.7 % 늘어난다</a:t>
             </a:r>
             <a:endParaRPr lang="en-US" sz="1050" dirty="0"/>
           </a:p>
@@ -15760,7 +15789,7 @@
                           <a:ea typeface="맑은 고딕" pitchFamily="34" charset="-122"/>
                           <a:cs typeface="맑은 고딕" pitchFamily="34" charset="-120"/>
                         </a:rPr>
-                        <a:t>0.0000180°  (두 배)</a:t>
+                        <a:t>0.0000179°  (약 두 배)</a:t>
                       </a:r>
                       <a:endParaRPr lang="en-US" sz="1050" dirty="0">
                         <a:latin typeface="맑은 고딕" charset="0"/>
